--- a/清心敬拜.pptx
+++ b/清心敬拜.pptx
@@ -5,8 +5,10 @@
     <p:sldMasterId id="2147483672" r:id="rId1"/>
   </p:sldMasterIdLst>
   <p:sldIdLst>
-    <p:sldId id="256" r:id="rId2"/>
-    <p:sldId id="257" r:id="rId3"/>
+    <p:sldId id="391" r:id="rId2"/>
+    <p:sldId id="392" r:id="rId3"/>
+    <p:sldId id="393" r:id="rId4"/>
+    <p:sldId id="394" r:id="rId5"/>
   </p:sldIdLst>
   <p:sldSz cx="9144000" cy="5143500" type="screen16x9"/>
   <p:notesSz cx="6858000" cy="9144000"/>
@@ -105,6 +107,22 @@
       </a:defRPr>
     </a:lvl9pPr>
   </p:defaultTextStyle>
+  <p:extLst>
+    <p:ext uri="{EFAFB233-063F-42B5-8137-9DF3F51BA10A}">
+      <p15:sldGuideLst xmlns:p15="http://schemas.microsoft.com/office/powerpoint/2012/main">
+        <p15:guide id="1" orient="horz" pos="1620">
+          <p15:clr>
+            <a:srgbClr val="A4A3A4"/>
+          </p15:clr>
+        </p15:guide>
+        <p15:guide id="2" pos="2880">
+          <p15:clr>
+            <a:srgbClr val="A4A3A4"/>
+          </p15:clr>
+        </p15:guide>
+      </p15:sldGuideLst>
+    </p:ext>
+  </p:extLst>
 </p:presentation>
 </file>
 
@@ -146,10 +164,9 @@
           <a:lstStyle/>
           <a:p>
             <a:r>
-              <a:rPr lang="zh-TW" altLang="en-US" smtClean="0"/>
+              <a:rPr lang="zh-TW" altLang="en-US"/>
               <a:t>按一下以編輯母片標題樣式</a:t>
             </a:r>
-            <a:endParaRPr lang="zh-TW" altLang="en-US"/>
           </a:p>
         </p:txBody>
       </p:sp>
@@ -265,10 +282,9 @@
           </a:lstStyle>
           <a:p>
             <a:r>
-              <a:rPr lang="zh-TW" altLang="en-US" smtClean="0"/>
+              <a:rPr lang="zh-TW" altLang="en-US"/>
               <a:t>按一下以編輯母片副標題樣式</a:t>
             </a:r>
-            <a:endParaRPr lang="zh-TW" altLang="en-US"/>
           </a:p>
         </p:txBody>
       </p:sp>
@@ -290,7 +306,7 @@
             <a:fld id="{489BF7ED-DC58-4A61-91FF-931B2E40DFCB}" type="datetimeFigureOut">
               <a:rPr lang="zh-TW" altLang="en-US" smtClean="0"/>
               <a:pPr/>
-              <a:t>2020/6/16</a:t>
+              <a:t>2026/4/17</a:t>
             </a:fld>
             <a:endParaRPr lang="zh-TW" altLang="en-US"/>
           </a:p>
@@ -380,10 +396,9 @@
           <a:lstStyle/>
           <a:p>
             <a:r>
-              <a:rPr lang="zh-TW" altLang="en-US" smtClean="0"/>
+              <a:rPr lang="zh-TW" altLang="en-US"/>
               <a:t>按一下以編輯母片標題樣式</a:t>
             </a:r>
-            <a:endParaRPr lang="zh-TW" altLang="en-US"/>
           </a:p>
         </p:txBody>
       </p:sp>
@@ -404,38 +419,37 @@
           <a:p>
             <a:pPr lvl="0"/>
             <a:r>
-              <a:rPr lang="zh-TW" altLang="en-US" smtClean="0"/>
+              <a:rPr lang="zh-TW" altLang="en-US"/>
               <a:t>按一下以編輯母片文字樣式</a:t>
             </a:r>
           </a:p>
           <a:p>
             <a:pPr lvl="1"/>
             <a:r>
-              <a:rPr lang="zh-TW" altLang="en-US" smtClean="0"/>
+              <a:rPr lang="zh-TW" altLang="en-US"/>
               <a:t>第二層</a:t>
             </a:r>
           </a:p>
           <a:p>
             <a:pPr lvl="2"/>
             <a:r>
-              <a:rPr lang="zh-TW" altLang="en-US" smtClean="0"/>
+              <a:rPr lang="zh-TW" altLang="en-US"/>
               <a:t>第三層</a:t>
             </a:r>
           </a:p>
           <a:p>
             <a:pPr lvl="3"/>
             <a:r>
-              <a:rPr lang="zh-TW" altLang="en-US" smtClean="0"/>
+              <a:rPr lang="zh-TW" altLang="en-US"/>
               <a:t>第四層</a:t>
             </a:r>
           </a:p>
           <a:p>
             <a:pPr lvl="4"/>
             <a:r>
-              <a:rPr lang="zh-TW" altLang="en-US" smtClean="0"/>
+              <a:rPr lang="zh-TW" altLang="en-US"/>
               <a:t>第五層</a:t>
             </a:r>
-            <a:endParaRPr lang="zh-TW" altLang="en-US"/>
           </a:p>
         </p:txBody>
       </p:sp>
@@ -457,7 +471,7 @@
             <a:fld id="{489BF7ED-DC58-4A61-91FF-931B2E40DFCB}" type="datetimeFigureOut">
               <a:rPr lang="zh-TW" altLang="en-US" smtClean="0"/>
               <a:pPr/>
-              <a:t>2020/6/16</a:t>
+              <a:t>2026/4/17</a:t>
             </a:fld>
             <a:endParaRPr lang="zh-TW" altLang="en-US"/>
           </a:p>
@@ -552,10 +566,9 @@
           <a:lstStyle/>
           <a:p>
             <a:r>
-              <a:rPr lang="zh-TW" altLang="en-US" smtClean="0"/>
+              <a:rPr lang="zh-TW" altLang="en-US"/>
               <a:t>按一下以編輯母片標題樣式</a:t>
             </a:r>
-            <a:endParaRPr lang="zh-TW" altLang="en-US"/>
           </a:p>
         </p:txBody>
       </p:sp>
@@ -581,38 +594,37 @@
           <a:p>
             <a:pPr lvl="0"/>
             <a:r>
-              <a:rPr lang="zh-TW" altLang="en-US" smtClean="0"/>
+              <a:rPr lang="zh-TW" altLang="en-US"/>
               <a:t>按一下以編輯母片文字樣式</a:t>
             </a:r>
           </a:p>
           <a:p>
             <a:pPr lvl="1"/>
             <a:r>
-              <a:rPr lang="zh-TW" altLang="en-US" smtClean="0"/>
+              <a:rPr lang="zh-TW" altLang="en-US"/>
               <a:t>第二層</a:t>
             </a:r>
           </a:p>
           <a:p>
             <a:pPr lvl="2"/>
             <a:r>
-              <a:rPr lang="zh-TW" altLang="en-US" smtClean="0"/>
+              <a:rPr lang="zh-TW" altLang="en-US"/>
               <a:t>第三層</a:t>
             </a:r>
           </a:p>
           <a:p>
             <a:pPr lvl="3"/>
             <a:r>
-              <a:rPr lang="zh-TW" altLang="en-US" smtClean="0"/>
+              <a:rPr lang="zh-TW" altLang="en-US"/>
               <a:t>第四層</a:t>
             </a:r>
           </a:p>
           <a:p>
             <a:pPr lvl="4"/>
             <a:r>
-              <a:rPr lang="zh-TW" altLang="en-US" smtClean="0"/>
+              <a:rPr lang="zh-TW" altLang="en-US"/>
               <a:t>第五層</a:t>
             </a:r>
-            <a:endParaRPr lang="zh-TW" altLang="en-US"/>
           </a:p>
         </p:txBody>
       </p:sp>
@@ -634,7 +646,7 @@
             <a:fld id="{489BF7ED-DC58-4A61-91FF-931B2E40DFCB}" type="datetimeFigureOut">
               <a:rPr lang="zh-TW" altLang="en-US" smtClean="0"/>
               <a:pPr/>
-              <a:t>2020/6/16</a:t>
+              <a:t>2026/4/17</a:t>
             </a:fld>
             <a:endParaRPr lang="zh-TW" altLang="en-US"/>
           </a:p>
@@ -724,10 +736,9 @@
           <a:lstStyle/>
           <a:p>
             <a:r>
-              <a:rPr lang="zh-TW" altLang="en-US" smtClean="0"/>
+              <a:rPr lang="zh-TW" altLang="en-US"/>
               <a:t>按一下以編輯母片標題樣式</a:t>
             </a:r>
-            <a:endParaRPr lang="zh-TW" altLang="en-US"/>
           </a:p>
         </p:txBody>
       </p:sp>
@@ -748,38 +759,37 @@
           <a:p>
             <a:pPr lvl="0"/>
             <a:r>
-              <a:rPr lang="zh-TW" altLang="en-US" smtClean="0"/>
+              <a:rPr lang="zh-TW" altLang="en-US"/>
               <a:t>按一下以編輯母片文字樣式</a:t>
             </a:r>
           </a:p>
           <a:p>
             <a:pPr lvl="1"/>
             <a:r>
-              <a:rPr lang="zh-TW" altLang="en-US" smtClean="0"/>
+              <a:rPr lang="zh-TW" altLang="en-US"/>
               <a:t>第二層</a:t>
             </a:r>
           </a:p>
           <a:p>
             <a:pPr lvl="2"/>
             <a:r>
-              <a:rPr lang="zh-TW" altLang="en-US" smtClean="0"/>
+              <a:rPr lang="zh-TW" altLang="en-US"/>
               <a:t>第三層</a:t>
             </a:r>
           </a:p>
           <a:p>
             <a:pPr lvl="3"/>
             <a:r>
-              <a:rPr lang="zh-TW" altLang="en-US" smtClean="0"/>
+              <a:rPr lang="zh-TW" altLang="en-US"/>
               <a:t>第四層</a:t>
             </a:r>
           </a:p>
           <a:p>
             <a:pPr lvl="4"/>
             <a:r>
-              <a:rPr lang="zh-TW" altLang="en-US" smtClean="0"/>
+              <a:rPr lang="zh-TW" altLang="en-US"/>
               <a:t>第五層</a:t>
             </a:r>
-            <a:endParaRPr lang="zh-TW" altLang="en-US"/>
           </a:p>
         </p:txBody>
       </p:sp>
@@ -801,7 +811,7 @@
             <a:fld id="{489BF7ED-DC58-4A61-91FF-931B2E40DFCB}" type="datetimeFigureOut">
               <a:rPr lang="zh-TW" altLang="en-US" smtClean="0"/>
               <a:pPr/>
-              <a:t>2020/6/16</a:t>
+              <a:t>2026/4/17</a:t>
             </a:fld>
             <a:endParaRPr lang="zh-TW" altLang="en-US"/>
           </a:p>
@@ -900,10 +910,9 @@
           </a:lstStyle>
           <a:p>
             <a:r>
-              <a:rPr lang="zh-TW" altLang="en-US" smtClean="0"/>
+              <a:rPr lang="zh-TW" altLang="en-US"/>
               <a:t>按一下以編輯母片標題樣式</a:t>
             </a:r>
-            <a:endParaRPr lang="zh-TW" altLang="en-US"/>
           </a:p>
         </p:txBody>
       </p:sp>
@@ -1020,7 +1029,7 @@
           <a:p>
             <a:pPr lvl="0"/>
             <a:r>
-              <a:rPr lang="zh-TW" altLang="en-US" smtClean="0"/>
+              <a:rPr lang="zh-TW" altLang="en-US"/>
               <a:t>按一下以編輯母片文字樣式</a:t>
             </a:r>
           </a:p>
@@ -1044,7 +1053,7 @@
             <a:fld id="{489BF7ED-DC58-4A61-91FF-931B2E40DFCB}" type="datetimeFigureOut">
               <a:rPr lang="zh-TW" altLang="en-US" smtClean="0"/>
               <a:pPr/>
-              <a:t>2020/6/16</a:t>
+              <a:t>2026/4/17</a:t>
             </a:fld>
             <a:endParaRPr lang="zh-TW" altLang="en-US"/>
           </a:p>
@@ -1134,10 +1143,9 @@
           <a:lstStyle/>
           <a:p>
             <a:r>
-              <a:rPr lang="zh-TW" altLang="en-US" smtClean="0"/>
+              <a:rPr lang="zh-TW" altLang="en-US"/>
               <a:t>按一下以編輯母片標題樣式</a:t>
             </a:r>
-            <a:endParaRPr lang="zh-TW" altLang="en-US"/>
           </a:p>
         </p:txBody>
       </p:sp>
@@ -1191,38 +1199,37 @@
           <a:p>
             <a:pPr lvl="0"/>
             <a:r>
-              <a:rPr lang="zh-TW" altLang="en-US" smtClean="0"/>
+              <a:rPr lang="zh-TW" altLang="en-US"/>
               <a:t>按一下以編輯母片文字樣式</a:t>
             </a:r>
           </a:p>
           <a:p>
             <a:pPr lvl="1"/>
             <a:r>
-              <a:rPr lang="zh-TW" altLang="en-US" smtClean="0"/>
+              <a:rPr lang="zh-TW" altLang="en-US"/>
               <a:t>第二層</a:t>
             </a:r>
           </a:p>
           <a:p>
             <a:pPr lvl="2"/>
             <a:r>
-              <a:rPr lang="zh-TW" altLang="en-US" smtClean="0"/>
+              <a:rPr lang="zh-TW" altLang="en-US"/>
               <a:t>第三層</a:t>
             </a:r>
           </a:p>
           <a:p>
             <a:pPr lvl="3"/>
             <a:r>
-              <a:rPr lang="zh-TW" altLang="en-US" smtClean="0"/>
+              <a:rPr lang="zh-TW" altLang="en-US"/>
               <a:t>第四層</a:t>
             </a:r>
           </a:p>
           <a:p>
             <a:pPr lvl="4"/>
             <a:r>
-              <a:rPr lang="zh-TW" altLang="en-US" smtClean="0"/>
+              <a:rPr lang="zh-TW" altLang="en-US"/>
               <a:t>第五層</a:t>
             </a:r>
-            <a:endParaRPr lang="zh-TW" altLang="en-US"/>
           </a:p>
         </p:txBody>
       </p:sp>
@@ -1276,38 +1283,37 @@
           <a:p>
             <a:pPr lvl="0"/>
             <a:r>
-              <a:rPr lang="zh-TW" altLang="en-US" smtClean="0"/>
+              <a:rPr lang="zh-TW" altLang="en-US"/>
               <a:t>按一下以編輯母片文字樣式</a:t>
             </a:r>
           </a:p>
           <a:p>
             <a:pPr lvl="1"/>
             <a:r>
-              <a:rPr lang="zh-TW" altLang="en-US" smtClean="0"/>
+              <a:rPr lang="zh-TW" altLang="en-US"/>
               <a:t>第二層</a:t>
             </a:r>
           </a:p>
           <a:p>
             <a:pPr lvl="2"/>
             <a:r>
-              <a:rPr lang="zh-TW" altLang="en-US" smtClean="0"/>
+              <a:rPr lang="zh-TW" altLang="en-US"/>
               <a:t>第三層</a:t>
             </a:r>
           </a:p>
           <a:p>
             <a:pPr lvl="3"/>
             <a:r>
-              <a:rPr lang="zh-TW" altLang="en-US" smtClean="0"/>
+              <a:rPr lang="zh-TW" altLang="en-US"/>
               <a:t>第四層</a:t>
             </a:r>
           </a:p>
           <a:p>
             <a:pPr lvl="4"/>
             <a:r>
-              <a:rPr lang="zh-TW" altLang="en-US" smtClean="0"/>
+              <a:rPr lang="zh-TW" altLang="en-US"/>
               <a:t>第五層</a:t>
             </a:r>
-            <a:endParaRPr lang="zh-TW" altLang="en-US"/>
           </a:p>
         </p:txBody>
       </p:sp>
@@ -1329,7 +1335,7 @@
             <a:fld id="{489BF7ED-DC58-4A61-91FF-931B2E40DFCB}" type="datetimeFigureOut">
               <a:rPr lang="zh-TW" altLang="en-US" smtClean="0"/>
               <a:pPr/>
-              <a:t>2020/6/16</a:t>
+              <a:t>2026/4/17</a:t>
             </a:fld>
             <a:endParaRPr lang="zh-TW" altLang="en-US"/>
           </a:p>
@@ -1423,10 +1429,9 @@
           </a:lstStyle>
           <a:p>
             <a:r>
-              <a:rPr lang="zh-TW" altLang="en-US" smtClean="0"/>
+              <a:rPr lang="zh-TW" altLang="en-US"/>
               <a:t>按一下以編輯母片標題樣式</a:t>
             </a:r>
-            <a:endParaRPr lang="zh-TW" altLang="en-US"/>
           </a:p>
         </p:txBody>
       </p:sp>
@@ -1489,7 +1494,7 @@
           <a:p>
             <a:pPr lvl="0"/>
             <a:r>
-              <a:rPr lang="zh-TW" altLang="en-US" smtClean="0"/>
+              <a:rPr lang="zh-TW" altLang="en-US"/>
               <a:t>按一下以編輯母片文字樣式</a:t>
             </a:r>
           </a:p>
@@ -1545,38 +1550,37 @@
           <a:p>
             <a:pPr lvl="0"/>
             <a:r>
-              <a:rPr lang="zh-TW" altLang="en-US" smtClean="0"/>
+              <a:rPr lang="zh-TW" altLang="en-US"/>
               <a:t>按一下以編輯母片文字樣式</a:t>
             </a:r>
           </a:p>
           <a:p>
             <a:pPr lvl="1"/>
             <a:r>
-              <a:rPr lang="zh-TW" altLang="en-US" smtClean="0"/>
+              <a:rPr lang="zh-TW" altLang="en-US"/>
               <a:t>第二層</a:t>
             </a:r>
           </a:p>
           <a:p>
             <a:pPr lvl="2"/>
             <a:r>
-              <a:rPr lang="zh-TW" altLang="en-US" smtClean="0"/>
+              <a:rPr lang="zh-TW" altLang="en-US"/>
               <a:t>第三層</a:t>
             </a:r>
           </a:p>
           <a:p>
             <a:pPr lvl="3"/>
             <a:r>
-              <a:rPr lang="zh-TW" altLang="en-US" smtClean="0"/>
+              <a:rPr lang="zh-TW" altLang="en-US"/>
               <a:t>第四層</a:t>
             </a:r>
           </a:p>
           <a:p>
             <a:pPr lvl="4"/>
             <a:r>
-              <a:rPr lang="zh-TW" altLang="en-US" smtClean="0"/>
+              <a:rPr lang="zh-TW" altLang="en-US"/>
               <a:t>第五層</a:t>
             </a:r>
-            <a:endParaRPr lang="zh-TW" altLang="en-US"/>
           </a:p>
         </p:txBody>
       </p:sp>
@@ -1639,7 +1643,7 @@
           <a:p>
             <a:pPr lvl="0"/>
             <a:r>
-              <a:rPr lang="zh-TW" altLang="en-US" smtClean="0"/>
+              <a:rPr lang="zh-TW" altLang="en-US"/>
               <a:t>按一下以編輯母片文字樣式</a:t>
             </a:r>
           </a:p>
@@ -1695,38 +1699,37 @@
           <a:p>
             <a:pPr lvl="0"/>
             <a:r>
-              <a:rPr lang="zh-TW" altLang="en-US" smtClean="0"/>
+              <a:rPr lang="zh-TW" altLang="en-US"/>
               <a:t>按一下以編輯母片文字樣式</a:t>
             </a:r>
           </a:p>
           <a:p>
             <a:pPr lvl="1"/>
             <a:r>
-              <a:rPr lang="zh-TW" altLang="en-US" smtClean="0"/>
+              <a:rPr lang="zh-TW" altLang="en-US"/>
               <a:t>第二層</a:t>
             </a:r>
           </a:p>
           <a:p>
             <a:pPr lvl="2"/>
             <a:r>
-              <a:rPr lang="zh-TW" altLang="en-US" smtClean="0"/>
+              <a:rPr lang="zh-TW" altLang="en-US"/>
               <a:t>第三層</a:t>
             </a:r>
           </a:p>
           <a:p>
             <a:pPr lvl="3"/>
             <a:r>
-              <a:rPr lang="zh-TW" altLang="en-US" smtClean="0"/>
+              <a:rPr lang="zh-TW" altLang="en-US"/>
               <a:t>第四層</a:t>
             </a:r>
           </a:p>
           <a:p>
             <a:pPr lvl="4"/>
             <a:r>
-              <a:rPr lang="zh-TW" altLang="en-US" smtClean="0"/>
+              <a:rPr lang="zh-TW" altLang="en-US"/>
               <a:t>第五層</a:t>
             </a:r>
-            <a:endParaRPr lang="zh-TW" altLang="en-US"/>
           </a:p>
         </p:txBody>
       </p:sp>
@@ -1748,7 +1751,7 @@
             <a:fld id="{489BF7ED-DC58-4A61-91FF-931B2E40DFCB}" type="datetimeFigureOut">
               <a:rPr lang="zh-TW" altLang="en-US" smtClean="0"/>
               <a:pPr/>
-              <a:t>2020/6/16</a:t>
+              <a:t>2026/4/17</a:t>
             </a:fld>
             <a:endParaRPr lang="zh-TW" altLang="en-US"/>
           </a:p>
@@ -1838,10 +1841,9 @@
           <a:lstStyle/>
           <a:p>
             <a:r>
-              <a:rPr lang="zh-TW" altLang="en-US" smtClean="0"/>
+              <a:rPr lang="zh-TW" altLang="en-US"/>
               <a:t>按一下以編輯母片標題樣式</a:t>
             </a:r>
-            <a:endParaRPr lang="zh-TW" altLang="en-US"/>
           </a:p>
         </p:txBody>
       </p:sp>
@@ -1863,7 +1865,7 @@
             <a:fld id="{489BF7ED-DC58-4A61-91FF-931B2E40DFCB}" type="datetimeFigureOut">
               <a:rPr lang="zh-TW" altLang="en-US" smtClean="0"/>
               <a:pPr/>
-              <a:t>2020/6/16</a:t>
+              <a:t>2026/4/17</a:t>
             </a:fld>
             <a:endParaRPr lang="zh-TW" altLang="en-US"/>
           </a:p>
@@ -1955,7 +1957,7 @@
             <a:fld id="{489BF7ED-DC58-4A61-91FF-931B2E40DFCB}" type="datetimeFigureOut">
               <a:rPr lang="zh-TW" altLang="en-US" smtClean="0"/>
               <a:pPr/>
-              <a:t>2020/6/16</a:t>
+              <a:t>2026/4/17</a:t>
             </a:fld>
             <a:endParaRPr lang="zh-TW" altLang="en-US"/>
           </a:p>
@@ -2054,10 +2056,9 @@
           </a:lstStyle>
           <a:p>
             <a:r>
-              <a:rPr lang="zh-TW" altLang="en-US" smtClean="0"/>
+              <a:rPr lang="zh-TW" altLang="en-US"/>
               <a:t>按一下以編輯母片標題樣式</a:t>
             </a:r>
-            <a:endParaRPr lang="zh-TW" altLang="en-US"/>
           </a:p>
         </p:txBody>
       </p:sp>
@@ -2111,38 +2112,37 @@
           <a:p>
             <a:pPr lvl="0"/>
             <a:r>
-              <a:rPr lang="zh-TW" altLang="en-US" smtClean="0"/>
+              <a:rPr lang="zh-TW" altLang="en-US"/>
               <a:t>按一下以編輯母片文字樣式</a:t>
             </a:r>
           </a:p>
           <a:p>
             <a:pPr lvl="1"/>
             <a:r>
-              <a:rPr lang="zh-TW" altLang="en-US" smtClean="0"/>
+              <a:rPr lang="zh-TW" altLang="en-US"/>
               <a:t>第二層</a:t>
             </a:r>
           </a:p>
           <a:p>
             <a:pPr lvl="2"/>
             <a:r>
-              <a:rPr lang="zh-TW" altLang="en-US" smtClean="0"/>
+              <a:rPr lang="zh-TW" altLang="en-US"/>
               <a:t>第三層</a:t>
             </a:r>
           </a:p>
           <a:p>
             <a:pPr lvl="3"/>
             <a:r>
-              <a:rPr lang="zh-TW" altLang="en-US" smtClean="0"/>
+              <a:rPr lang="zh-TW" altLang="en-US"/>
               <a:t>第四層</a:t>
             </a:r>
           </a:p>
           <a:p>
             <a:pPr lvl="4"/>
             <a:r>
-              <a:rPr lang="zh-TW" altLang="en-US" smtClean="0"/>
+              <a:rPr lang="zh-TW" altLang="en-US"/>
               <a:t>第五層</a:t>
             </a:r>
-            <a:endParaRPr lang="zh-TW" altLang="en-US"/>
           </a:p>
         </p:txBody>
       </p:sp>
@@ -2205,7 +2205,7 @@
           <a:p>
             <a:pPr lvl="0"/>
             <a:r>
-              <a:rPr lang="zh-TW" altLang="en-US" smtClean="0"/>
+              <a:rPr lang="zh-TW" altLang="en-US"/>
               <a:t>按一下以編輯母片文字樣式</a:t>
             </a:r>
           </a:p>
@@ -2229,7 +2229,7 @@
             <a:fld id="{489BF7ED-DC58-4A61-91FF-931B2E40DFCB}" type="datetimeFigureOut">
               <a:rPr lang="zh-TW" altLang="en-US" smtClean="0"/>
               <a:pPr/>
-              <a:t>2020/6/16</a:t>
+              <a:t>2026/4/17</a:t>
             </a:fld>
             <a:endParaRPr lang="zh-TW" altLang="en-US"/>
           </a:p>
@@ -2328,10 +2328,9 @@
           </a:lstStyle>
           <a:p>
             <a:r>
-              <a:rPr lang="zh-TW" altLang="en-US" smtClean="0"/>
+              <a:rPr lang="zh-TW" altLang="en-US"/>
               <a:t>按一下以編輯母片標題樣式</a:t>
             </a:r>
-            <a:endParaRPr lang="zh-TW" altLang="en-US"/>
           </a:p>
         </p:txBody>
       </p:sp>
@@ -2393,10 +2392,9 @@
           </a:lstStyle>
           <a:p>
             <a:r>
-              <a:rPr lang="zh-TW" altLang="en-US" smtClean="0"/>
+              <a:rPr lang="zh-TW" altLang="en-US"/>
               <a:t>按一下圖示以新增圖片</a:t>
             </a:r>
-            <a:endParaRPr lang="zh-TW" altLang="en-US"/>
           </a:p>
         </p:txBody>
       </p:sp>
@@ -2459,7 +2457,7 @@
           <a:p>
             <a:pPr lvl="0"/>
             <a:r>
-              <a:rPr lang="zh-TW" altLang="en-US" smtClean="0"/>
+              <a:rPr lang="zh-TW" altLang="en-US"/>
               <a:t>按一下以編輯母片文字樣式</a:t>
             </a:r>
           </a:p>
@@ -2483,7 +2481,7 @@
             <a:fld id="{489BF7ED-DC58-4A61-91FF-931B2E40DFCB}" type="datetimeFigureOut">
               <a:rPr lang="zh-TW" altLang="en-US" smtClean="0"/>
               <a:pPr/>
-              <a:t>2020/6/16</a:t>
+              <a:t>2026/4/17</a:t>
             </a:fld>
             <a:endParaRPr lang="zh-TW" altLang="en-US"/>
           </a:p>
@@ -2593,10 +2591,9 @@
           <a:lstStyle/>
           <a:p>
             <a:r>
-              <a:rPr lang="zh-TW" altLang="en-US" smtClean="0"/>
+              <a:rPr lang="zh-TW" altLang="en-US"/>
               <a:t>按一下以編輯母片標題樣式</a:t>
             </a:r>
-            <a:endParaRPr lang="zh-TW" altLang="en-US"/>
           </a:p>
         </p:txBody>
       </p:sp>
@@ -2627,38 +2624,37 @@
           <a:p>
             <a:pPr lvl="0"/>
             <a:r>
-              <a:rPr lang="zh-TW" altLang="en-US" smtClean="0"/>
+              <a:rPr lang="zh-TW" altLang="en-US"/>
               <a:t>按一下以編輯母片文字樣式</a:t>
             </a:r>
           </a:p>
           <a:p>
             <a:pPr lvl="1"/>
             <a:r>
-              <a:rPr lang="zh-TW" altLang="en-US" smtClean="0"/>
+              <a:rPr lang="zh-TW" altLang="en-US"/>
               <a:t>第二層</a:t>
             </a:r>
           </a:p>
           <a:p>
             <a:pPr lvl="2"/>
             <a:r>
-              <a:rPr lang="zh-TW" altLang="en-US" smtClean="0"/>
+              <a:rPr lang="zh-TW" altLang="en-US"/>
               <a:t>第三層</a:t>
             </a:r>
           </a:p>
           <a:p>
             <a:pPr lvl="3"/>
             <a:r>
-              <a:rPr lang="zh-TW" altLang="en-US" smtClean="0"/>
+              <a:rPr lang="zh-TW" altLang="en-US"/>
               <a:t>第四層</a:t>
             </a:r>
           </a:p>
           <a:p>
             <a:pPr lvl="4"/>
             <a:r>
-              <a:rPr lang="zh-TW" altLang="en-US" smtClean="0"/>
+              <a:rPr lang="zh-TW" altLang="en-US"/>
               <a:t>第五層</a:t>
             </a:r>
-            <a:endParaRPr lang="zh-TW" altLang="en-US"/>
           </a:p>
         </p:txBody>
       </p:sp>
@@ -2698,7 +2694,7 @@
             <a:fld id="{489BF7ED-DC58-4A61-91FF-931B2E40DFCB}" type="datetimeFigureOut">
               <a:rPr lang="zh-TW" altLang="en-US" smtClean="0"/>
               <a:pPr/>
-              <a:t>2020/6/16</a:t>
+              <a:t>2026/4/17</a:t>
             </a:fld>
             <a:endParaRPr lang="zh-TW" altLang="en-US"/>
           </a:p>
@@ -3057,7 +3053,13 @@
   <p:cSld>
     <p:spTree>
       <p:nvGrpSpPr>
-        <p:cNvPr id="1" name=""/>
+        <p:cNvPr id="1" name="">
+          <a:extLst>
+            <a:ext uri="{FF2B5EF4-FFF2-40B4-BE49-F238E27FC236}">
+              <a16:creationId xmlns:a16="http://schemas.microsoft.com/office/drawing/2014/main" id="{5F20F3D7-EDDF-CE30-9060-314A88E3730B}"/>
+            </a:ext>
+          </a:extLst>
+        </p:cNvPr>
         <p:cNvGrpSpPr/>
         <p:nvPr/>
       </p:nvGrpSpPr>
@@ -3071,7 +3073,13 @@
       </p:grpSpPr>
       <p:sp>
         <p:nvSpPr>
-          <p:cNvPr id="4" name="標題 3"/>
+          <p:cNvPr id="4" name="標題 3">
+            <a:extLst>
+              <a:ext uri="{FF2B5EF4-FFF2-40B4-BE49-F238E27FC236}">
+                <a16:creationId xmlns:a16="http://schemas.microsoft.com/office/drawing/2014/main" id="{CD6A41DD-B5E6-D530-EC0F-85726817D119}"/>
+              </a:ext>
+            </a:extLst>
+          </p:cNvPr>
           <p:cNvSpPr>
             <a:spLocks noGrp="1"/>
           </p:cNvSpPr>
@@ -3079,219 +3087,48 @@
             <p:ph type="title"/>
           </p:nvPr>
         </p:nvSpPr>
-        <p:spPr/>
+        <p:spPr>
+          <a:xfrm>
+            <a:off x="0" y="1995686"/>
+            <a:ext cx="9144000" cy="857250"/>
+          </a:xfrm>
+        </p:spPr>
         <p:txBody>
           <a:bodyPr>
-            <a:normAutofit/>
+            <a:noAutofit/>
           </a:bodyPr>
           <a:lstStyle/>
           <a:p>
             <a:r>
-              <a:rPr lang="zh-TW" altLang="en-US" b="1" dirty="0" smtClean="0">
+              <a:rPr lang="zh-TW" altLang="en-US" sz="5400" b="1" i="1" dirty="0">
                 <a:solidFill>
                   <a:srgbClr val="000066"/>
                 </a:solidFill>
+                <a:effectLst>
+                  <a:outerShdw blurRad="38100" dist="38100" dir="2700000" algn="tl">
+                    <a:srgbClr val="000000">
+                      <a:alpha val="43137"/>
+                    </a:srgbClr>
+                  </a:outerShdw>
+                </a:effectLst>
                 <a:latin typeface="微軟正黑體" pitchFamily="34" charset="-120"/>
                 <a:ea typeface="微軟正黑體" pitchFamily="34" charset="-120"/>
               </a:rPr>
               <a:t>清心敬拜</a:t>
             </a:r>
-            <a:endParaRPr lang="zh-TW" altLang="en-US" b="1" dirty="0">
-              <a:solidFill>
-                <a:srgbClr val="000066"/>
-              </a:solidFill>
-              <a:latin typeface="微軟正黑體" pitchFamily="34" charset="-120"/>
-              <a:ea typeface="微軟正黑體" pitchFamily="34" charset="-120"/>
-            </a:endParaRPr>
-          </a:p>
-        </p:txBody>
-      </p:sp>
-      <p:sp>
-        <p:nvSpPr>
-          <p:cNvPr id="5" name="內容版面配置區 4"/>
-          <p:cNvSpPr>
-            <a:spLocks noGrp="1"/>
-          </p:cNvSpPr>
-          <p:nvPr>
-            <p:ph idx="1"/>
-          </p:nvPr>
-        </p:nvSpPr>
-        <p:spPr>
-          <a:xfrm>
-            <a:off x="352426" y="1097280"/>
-            <a:ext cx="8434416" cy="3543300"/>
-          </a:xfrm>
-        </p:spPr>
-        <p:txBody>
-          <a:bodyPr>
-            <a:normAutofit/>
-          </a:bodyPr>
-          <a:lstStyle/>
-          <a:p>
-            <a:pPr algn="ctr">
-              <a:buNone/>
-            </a:pPr>
-            <a:r>
-              <a:rPr lang="zh-TW" altLang="en-US" sz="4800" b="1" dirty="0" smtClean="0">
-                <a:solidFill>
-                  <a:srgbClr val="000066"/>
-                </a:solidFill>
-                <a:latin typeface="微軟正黑體" pitchFamily="34" charset="-120"/>
-                <a:ea typeface="微軟正黑體" pitchFamily="34" charset="-120"/>
-              </a:rPr>
-              <a:t>柔和我</a:t>
-            </a:r>
-            <a:r>
-              <a:rPr lang="zh-CN" altLang="en-US" sz="4800" b="1" dirty="0" smtClean="0">
-                <a:solidFill>
-                  <a:srgbClr val="000066"/>
-                </a:solidFill>
-                <a:latin typeface="微軟正黑體" pitchFamily="34" charset="-120"/>
-                <a:ea typeface="微軟正黑體" pitchFamily="34" charset="-120"/>
-              </a:rPr>
-              <a:t>聲</a:t>
-            </a:r>
-            <a:endParaRPr lang="en-US" altLang="zh-CN" sz="4800" b="1" dirty="0" smtClean="0">
-              <a:solidFill>
-                <a:srgbClr val="000066"/>
-              </a:solidFill>
-              <a:latin typeface="微軟正黑體" pitchFamily="34" charset="-120"/>
-              <a:ea typeface="微軟正黑體" pitchFamily="34" charset="-120"/>
-            </a:endParaRPr>
-          </a:p>
-          <a:p>
-            <a:pPr algn="ctr">
-              <a:buNone/>
-            </a:pPr>
-            <a:r>
-              <a:rPr lang="zh-TW" altLang="en-US" sz="4800" b="1" dirty="0" smtClean="0">
-                <a:solidFill>
-                  <a:srgbClr val="000066"/>
-                </a:solidFill>
-                <a:latin typeface="微軟正黑體" pitchFamily="34" charset="-120"/>
-                <a:ea typeface="微軟正黑體" pitchFamily="34" charset="-120"/>
-              </a:rPr>
-              <a:t>專心敬拜</a:t>
-            </a:r>
-            <a:r>
-              <a:rPr lang="zh-TW" altLang="en-US" sz="4800" b="1" dirty="0" smtClean="0">
-                <a:solidFill>
-                  <a:srgbClr val="000066"/>
-                </a:solidFill>
-                <a:latin typeface="微軟正黑體" pitchFamily="34" charset="-120"/>
-                <a:ea typeface="微軟正黑體" pitchFamily="34" charset="-120"/>
-              </a:rPr>
-              <a:t>歌頌</a:t>
-            </a:r>
-            <a:r>
-              <a:rPr lang="zh-CN" altLang="en-US" sz="4800" b="1" dirty="0" smtClean="0">
-                <a:solidFill>
-                  <a:srgbClr val="000066"/>
-                </a:solidFill>
-                <a:latin typeface="微軟正黑體" pitchFamily="34" charset="-120"/>
-                <a:ea typeface="微軟正黑體" pitchFamily="34" charset="-120"/>
-              </a:rPr>
-              <a:t>袮</a:t>
-            </a:r>
-            <a:endParaRPr lang="zh-TW" altLang="en-US" sz="4800" b="1" dirty="0" smtClean="0">
-              <a:solidFill>
-                <a:srgbClr val="000066"/>
-              </a:solidFill>
-              <a:latin typeface="微軟正黑體" pitchFamily="34" charset="-120"/>
-              <a:ea typeface="微軟正黑體" pitchFamily="34" charset="-120"/>
-            </a:endParaRPr>
-          </a:p>
-          <a:p>
-            <a:pPr algn="ctr">
-              <a:buNone/>
-            </a:pPr>
-            <a:r>
-              <a:rPr lang="zh-TW" altLang="en-US" sz="4800" b="1" dirty="0" smtClean="0">
-                <a:solidFill>
-                  <a:srgbClr val="000066"/>
-                </a:solidFill>
-                <a:latin typeface="微軟正黑體" pitchFamily="34" charset="-120"/>
-                <a:ea typeface="微軟正黑體" pitchFamily="34" charset="-120"/>
-              </a:rPr>
-              <a:t>靜待朝見主</a:t>
-            </a:r>
-          </a:p>
-          <a:p>
-            <a:pPr algn="ctr">
-              <a:buNone/>
-            </a:pPr>
-            <a:r>
-              <a:rPr lang="zh-TW" altLang="en-US" sz="4800" b="1" dirty="0" smtClean="0">
-                <a:solidFill>
-                  <a:srgbClr val="000066"/>
-                </a:solidFill>
-                <a:latin typeface="微軟正黑體" pitchFamily="34" charset="-120"/>
-                <a:ea typeface="微軟正黑體" pitchFamily="34" charset="-120"/>
-              </a:rPr>
-              <a:t>一心渴</a:t>
-            </a:r>
-            <a:r>
-              <a:rPr lang="zh-TW" altLang="en-US" sz="4800" b="1" dirty="0" smtClean="0">
-                <a:solidFill>
-                  <a:srgbClr val="000066"/>
-                </a:solidFill>
-                <a:latin typeface="微軟正黑體" pitchFamily="34" charset="-120"/>
-                <a:ea typeface="微軟正黑體" pitchFamily="34" charset="-120"/>
-              </a:rPr>
-              <a:t>見</a:t>
-            </a:r>
-            <a:r>
-              <a:rPr lang="zh-CN" altLang="en-US" sz="4800" b="1" dirty="0" smtClean="0">
-                <a:solidFill>
-                  <a:srgbClr val="000066"/>
-                </a:solidFill>
-                <a:latin typeface="微軟正黑體" pitchFamily="34" charset="-120"/>
-                <a:ea typeface="微軟正黑體" pitchFamily="34" charset="-120"/>
-              </a:rPr>
-              <a:t>袮</a:t>
-            </a:r>
-            <a:r>
-              <a:rPr lang="zh-TW" altLang="en-US" sz="4800" b="1" dirty="0" smtClean="0">
-                <a:solidFill>
-                  <a:srgbClr val="000066"/>
-                </a:solidFill>
-                <a:latin typeface="微軟正黑體" pitchFamily="34" charset="-120"/>
-                <a:ea typeface="微軟正黑體" pitchFamily="34" charset="-120"/>
-              </a:rPr>
-              <a:t>的</a:t>
-            </a:r>
-            <a:r>
-              <a:rPr lang="zh-TW" altLang="en-US" sz="4800" b="1" dirty="0" smtClean="0">
-                <a:solidFill>
-                  <a:srgbClr val="000066"/>
-                </a:solidFill>
-                <a:latin typeface="微軟正黑體" pitchFamily="34" charset="-120"/>
-                <a:ea typeface="微軟正黑體" pitchFamily="34" charset="-120"/>
-              </a:rPr>
-              <a:t>美</a:t>
-            </a:r>
-            <a:endParaRPr lang="zh-TW" altLang="en-US" sz="4800" b="1" dirty="0">
-              <a:solidFill>
-                <a:srgbClr val="000066"/>
-              </a:solidFill>
-              <a:latin typeface="微軟正黑體" pitchFamily="34" charset="-120"/>
-              <a:ea typeface="微軟正黑體" pitchFamily="34" charset="-120"/>
-            </a:endParaRPr>
           </a:p>
         </p:txBody>
       </p:sp>
     </p:spTree>
+    <p:extLst>
+      <p:ext uri="{BB962C8B-B14F-4D97-AF65-F5344CB8AC3E}">
+        <p14:creationId xmlns:p14="http://schemas.microsoft.com/office/powerpoint/2010/main" val="388492399"/>
+      </p:ext>
+    </p:extLst>
   </p:cSld>
   <p:clrMapOvr>
     <a:masterClrMapping/>
   </p:clrMapOvr>
-  <p:timing>
-    <p:tnLst>
-      <p:par>
-        <p:cTn id="1" dur="indefinite" restart="never" nodeType="tmRoot"/>
-      </p:par>
-    </p:tnLst>
-  </p:timing>
 </p:sld>
 </file>
 
@@ -3300,7 +3137,13 @@
   <p:cSld>
     <p:spTree>
       <p:nvGrpSpPr>
-        <p:cNvPr id="1" name=""/>
+        <p:cNvPr id="1" name="">
+          <a:extLst>
+            <a:ext uri="{FF2B5EF4-FFF2-40B4-BE49-F238E27FC236}">
+              <a16:creationId xmlns:a16="http://schemas.microsoft.com/office/drawing/2014/main" id="{499F6A04-361B-D03C-72FC-83746A3861FC}"/>
+            </a:ext>
+          </a:extLst>
+        </p:cNvPr>
         <p:cNvGrpSpPr/>
         <p:nvPr/>
       </p:nvGrpSpPr>
@@ -3314,32 +3157,101 @@
       </p:grpSpPr>
       <p:sp>
         <p:nvSpPr>
-          <p:cNvPr id="4" name="標題 3"/>
-          <p:cNvSpPr>
-            <a:spLocks noGrp="1"/>
-          </p:cNvSpPr>
-          <p:nvPr>
-            <p:ph type="title"/>
-          </p:nvPr>
-        </p:nvSpPr>
-        <p:spPr/>
-        <p:txBody>
-          <a:bodyPr>
+          <p:cNvPr id="5" name="內容版面配置區 4">
+            <a:extLst>
+              <a:ext uri="{FF2B5EF4-FFF2-40B4-BE49-F238E27FC236}">
+                <a16:creationId xmlns:a16="http://schemas.microsoft.com/office/drawing/2014/main" id="{EE77592B-EE8B-614D-4160-CDFC7BCE80DB}"/>
+              </a:ext>
+            </a:extLst>
+          </p:cNvPr>
+          <p:cNvSpPr>
+            <a:spLocks noGrp="1"/>
+          </p:cNvSpPr>
+          <p:nvPr>
+            <p:ph idx="1"/>
+          </p:nvPr>
+        </p:nvSpPr>
+        <p:spPr>
+          <a:xfrm>
+            <a:off x="0" y="1563639"/>
+            <a:ext cx="9144000" cy="1803647"/>
+          </a:xfrm>
+        </p:spPr>
+        <p:txBody>
+          <a:bodyPr anchor="ctr">
             <a:normAutofit/>
           </a:bodyPr>
           <a:lstStyle/>
           <a:p>
-            <a:r>
-              <a:rPr lang="zh-TW" altLang="en-US" b="1" dirty="0" smtClean="0">
+            <a:pPr algn="ctr">
+              <a:buNone/>
+            </a:pPr>
+            <a:r>
+              <a:rPr lang="zh-TW" altLang="en-US" sz="4800" b="1" dirty="0">
                 <a:solidFill>
                   <a:srgbClr val="000066"/>
                 </a:solidFill>
                 <a:latin typeface="微軟正黑體" pitchFamily="34" charset="-120"/>
                 <a:ea typeface="微軟正黑體" pitchFamily="34" charset="-120"/>
               </a:rPr>
-              <a:t>清心敬拜</a:t>
-            </a:r>
-            <a:endParaRPr lang="zh-TW" altLang="en-US" b="1" dirty="0">
+              <a:t>柔和我聲</a:t>
+            </a:r>
+            <a:r>
+              <a:rPr lang="zh-CN" altLang="en-US" sz="4800" b="1" dirty="0">
+                <a:solidFill>
+                  <a:srgbClr val="000066"/>
+                </a:solidFill>
+                <a:latin typeface="微軟正黑體" pitchFamily="34" charset="-120"/>
+                <a:ea typeface="微軟正黑體" pitchFamily="34" charset="-120"/>
+              </a:rPr>
+              <a:t>   </a:t>
+            </a:r>
+            <a:r>
+              <a:rPr lang="zh-TW" altLang="en-US" sz="4800" b="1" dirty="0">
+                <a:solidFill>
+                  <a:srgbClr val="000066"/>
+                </a:solidFill>
+                <a:latin typeface="微軟正黑體" pitchFamily="34" charset="-120"/>
+                <a:ea typeface="微軟正黑體" pitchFamily="34" charset="-120"/>
+              </a:rPr>
+              <a:t>專心敬拜歌頌祢</a:t>
+            </a:r>
+          </a:p>
+          <a:p>
+            <a:pPr algn="ctr">
+              <a:buNone/>
+            </a:pPr>
+            <a:r>
+              <a:rPr lang="zh-TW" altLang="en-US" sz="4800" b="1" dirty="0">
+                <a:solidFill>
+                  <a:srgbClr val="000066"/>
+                </a:solidFill>
+                <a:latin typeface="微軟正黑體" pitchFamily="34" charset="-120"/>
+                <a:ea typeface="微軟正黑體" pitchFamily="34" charset="-120"/>
+              </a:rPr>
+              <a:t>靜待朝見主</a:t>
+            </a:r>
+            <a:r>
+              <a:rPr lang="zh-CN" altLang="en-US" sz="4800" b="1" dirty="0">
+                <a:solidFill>
+                  <a:srgbClr val="000066"/>
+                </a:solidFill>
+                <a:latin typeface="微軟正黑體" pitchFamily="34" charset="-120"/>
+                <a:ea typeface="微軟正黑體" pitchFamily="34" charset="-120"/>
+              </a:rPr>
+              <a:t>   </a:t>
+            </a:r>
+            <a:r>
+              <a:rPr lang="zh-TW" altLang="en-US" sz="4800" b="1" dirty="0">
+                <a:solidFill>
+                  <a:srgbClr val="000066"/>
+                </a:solidFill>
+                <a:latin typeface="微軟正黑體" pitchFamily="34" charset="-120"/>
+                <a:ea typeface="微軟正黑體" pitchFamily="34" charset="-120"/>
+              </a:rPr>
+              <a:t>一心渴見祢的美</a:t>
+            </a:r>
+            <a:endParaRPr lang="en-US" altLang="zh-TW" sz="4800" b="1" dirty="0">
               <a:solidFill>
                 <a:srgbClr val="000066"/>
               </a:solidFill>
@@ -3351,22 +3263,132 @@
       </p:sp>
       <p:sp>
         <p:nvSpPr>
-          <p:cNvPr id="5" name="內容版面配置區 4"/>
-          <p:cNvSpPr>
-            <a:spLocks noGrp="1"/>
-          </p:cNvSpPr>
-          <p:nvPr>
-            <p:ph idx="1"/>
-          </p:nvPr>
+          <p:cNvPr id="3" name="TextBox 2">
+            <a:extLst>
+              <a:ext uri="{FF2B5EF4-FFF2-40B4-BE49-F238E27FC236}">
+                <a16:creationId xmlns:a16="http://schemas.microsoft.com/office/drawing/2014/main" id="{FA175DD0-F211-14DE-420F-4A50F79B6BD2}"/>
+              </a:ext>
+            </a:extLst>
+          </p:cNvPr>
+          <p:cNvSpPr txBox="1"/>
+          <p:nvPr/>
         </p:nvSpPr>
         <p:spPr>
           <a:xfrm>
-            <a:off x="352426" y="1097280"/>
-            <a:ext cx="8434416" cy="3543300"/>
+            <a:off x="0" y="3867895"/>
+            <a:ext cx="9144000" cy="461665"/>
+          </a:xfrm>
+          <a:prstGeom prst="rect">
+            <a:avLst/>
+          </a:prstGeom>
+          <a:noFill/>
+        </p:spPr>
+        <p:txBody>
+          <a:bodyPr wrap="square" rtlCol="0">
+            <a:spAutoFit/>
+          </a:bodyPr>
+          <a:lstStyle/>
+          <a:p>
+            <a:pPr algn="ctr"/>
+            <a:r>
+              <a:rPr lang="en-US" sz="2400" b="1" dirty="0">
+                <a:solidFill>
+                  <a:srgbClr val="000066"/>
+                </a:solidFill>
+                <a:latin typeface="Microsoft JhengHei" panose="020B0604030504040204" pitchFamily="34" charset="-120"/>
+                <a:ea typeface="Microsoft JhengHei" panose="020B0604030504040204" pitchFamily="34" charset="-120"/>
+              </a:rPr>
+              <a:t>( </a:t>
+            </a:r>
+            <a:r>
+              <a:rPr lang="zh-CN" altLang="en-US" sz="2400" b="1" dirty="0">
+                <a:solidFill>
+                  <a:srgbClr val="000066"/>
+                </a:solidFill>
+                <a:latin typeface="Microsoft JhengHei" panose="020B0604030504040204" pitchFamily="34" charset="-120"/>
+                <a:ea typeface="Microsoft JhengHei" panose="020B0604030504040204" pitchFamily="34" charset="-120"/>
+              </a:rPr>
+              <a:t>正歌</a:t>
+            </a:r>
+            <a:r>
+              <a:rPr lang="en-US" sz="2400" b="1" dirty="0">
+                <a:solidFill>
+                  <a:srgbClr val="000066"/>
+                </a:solidFill>
+                <a:latin typeface="Microsoft JhengHei" panose="020B0604030504040204" pitchFamily="34" charset="-120"/>
+                <a:ea typeface="Microsoft JhengHei" panose="020B0604030504040204" pitchFamily="34" charset="-120"/>
+              </a:rPr>
+              <a:t> )</a:t>
+            </a:r>
+            <a:endParaRPr lang="vi-VN" sz="2400" b="1" dirty="0">
+              <a:solidFill>
+                <a:srgbClr val="000066"/>
+              </a:solidFill>
+              <a:ea typeface="Microsoft JhengHei" panose="020B0604030504040204" pitchFamily="34" charset="-120"/>
+            </a:endParaRPr>
+          </a:p>
+        </p:txBody>
+      </p:sp>
+    </p:spTree>
+    <p:extLst>
+      <p:ext uri="{BB962C8B-B14F-4D97-AF65-F5344CB8AC3E}">
+        <p14:creationId xmlns:p14="http://schemas.microsoft.com/office/powerpoint/2010/main" val="3885075056"/>
+      </p:ext>
+    </p:extLst>
+  </p:cSld>
+  <p:clrMapOvr>
+    <a:masterClrMapping/>
+  </p:clrMapOvr>
+</p:sld>
+</file>
+
+<file path=ppt/slides/slide3.xml><?xml version="1.0" encoding="utf-8"?>
+<p:sld xmlns:a="http://schemas.openxmlformats.org/drawingml/2006/main" xmlns:r="http://schemas.openxmlformats.org/officeDocument/2006/relationships" xmlns:p="http://schemas.openxmlformats.org/presentationml/2006/main">
+  <p:cSld>
+    <p:spTree>
+      <p:nvGrpSpPr>
+        <p:cNvPr id="1" name="">
+          <a:extLst>
+            <a:ext uri="{FF2B5EF4-FFF2-40B4-BE49-F238E27FC236}">
+              <a16:creationId xmlns:a16="http://schemas.microsoft.com/office/drawing/2014/main" id="{D1EB29F2-9F96-12DF-C9BE-243502F5E75C}"/>
+            </a:ext>
+          </a:extLst>
+        </p:cNvPr>
+        <p:cNvGrpSpPr/>
+        <p:nvPr/>
+      </p:nvGrpSpPr>
+      <p:grpSpPr>
+        <a:xfrm>
+          <a:off x="0" y="0"/>
+          <a:ext cx="0" cy="0"/>
+          <a:chOff x="0" y="0"/>
+          <a:chExt cx="0" cy="0"/>
+        </a:xfrm>
+      </p:grpSpPr>
+      <p:sp>
+        <p:nvSpPr>
+          <p:cNvPr id="5" name="內容版面配置區 4">
+            <a:extLst>
+              <a:ext uri="{FF2B5EF4-FFF2-40B4-BE49-F238E27FC236}">
+                <a16:creationId xmlns:a16="http://schemas.microsoft.com/office/drawing/2014/main" id="{F420085C-EFF4-01EB-9E15-448C3FEB1192}"/>
+              </a:ext>
+            </a:extLst>
+          </p:cNvPr>
+          <p:cNvSpPr>
+            <a:spLocks noGrp="1"/>
+          </p:cNvSpPr>
+          <p:nvPr>
+            <p:ph idx="1"/>
+          </p:nvPr>
+        </p:nvSpPr>
+        <p:spPr>
+          <a:xfrm>
+            <a:off x="0" y="1563639"/>
+            <a:ext cx="9144000" cy="1803647"/>
           </a:xfrm>
         </p:spPr>
         <p:txBody>
-          <a:bodyPr>
+          <a:bodyPr anchor="ctr">
             <a:normAutofit/>
           </a:bodyPr>
           <a:lstStyle/>
@@ -3375,7 +3397,7 @@
               <a:buNone/>
             </a:pPr>
             <a:r>
-              <a:rPr lang="zh-TW" altLang="en-US" sz="4800" b="1" dirty="0" smtClean="0">
+              <a:rPr lang="zh-TW" altLang="en-US" sz="4800" b="1" dirty="0">
                 <a:solidFill>
                   <a:srgbClr val="000066"/>
                 </a:solidFill>
@@ -3390,7 +3412,7 @@
               <a:buNone/>
             </a:pPr>
             <a:r>
-              <a:rPr lang="zh-TW" altLang="en-US" sz="4800" b="1" dirty="0" smtClean="0">
+              <a:rPr lang="zh-TW" altLang="en-US" sz="4800" b="1" dirty="0">
                 <a:solidFill>
                   <a:srgbClr val="000066"/>
                 </a:solidFill>
@@ -3400,12 +3422,145 @@
               <a:t>心嚮往到我主的山嶺</a:t>
             </a:r>
           </a:p>
+        </p:txBody>
+      </p:sp>
+      <p:sp>
+        <p:nvSpPr>
+          <p:cNvPr id="3" name="TextBox 2">
+            <a:extLst>
+              <a:ext uri="{FF2B5EF4-FFF2-40B4-BE49-F238E27FC236}">
+                <a16:creationId xmlns:a16="http://schemas.microsoft.com/office/drawing/2014/main" id="{06338F02-E91F-5EF5-ADBD-7FABB194EFD0}"/>
+              </a:ext>
+            </a:extLst>
+          </p:cNvPr>
+          <p:cNvSpPr txBox="1"/>
+          <p:nvPr/>
+        </p:nvSpPr>
+        <p:spPr>
+          <a:xfrm>
+            <a:off x="0" y="3867895"/>
+            <a:ext cx="9144000" cy="461665"/>
+          </a:xfrm>
+          <a:prstGeom prst="rect">
+            <a:avLst/>
+          </a:prstGeom>
+          <a:noFill/>
+        </p:spPr>
+        <p:txBody>
+          <a:bodyPr wrap="square" rtlCol="0">
+            <a:spAutoFit/>
+          </a:bodyPr>
+          <a:lstStyle/>
+          <a:p>
+            <a:pPr algn="ctr"/>
+            <a:r>
+              <a:rPr lang="en-US" sz="2400" b="1" dirty="0">
+                <a:solidFill>
+                  <a:srgbClr val="000066"/>
+                </a:solidFill>
+                <a:latin typeface="Microsoft JhengHei" panose="020B0604030504040204" pitchFamily="34" charset="-120"/>
+                <a:ea typeface="Microsoft JhengHei" panose="020B0604030504040204" pitchFamily="34" charset="-120"/>
+              </a:rPr>
+              <a:t>( </a:t>
+            </a:r>
+            <a:r>
+              <a:rPr lang="zh-CN" altLang="en-US" sz="2400" b="1" dirty="0">
+                <a:solidFill>
+                  <a:srgbClr val="000066"/>
+                </a:solidFill>
+                <a:latin typeface="Microsoft JhengHei" panose="020B0604030504040204" pitchFamily="34" charset="-120"/>
+                <a:ea typeface="Microsoft JhengHei" panose="020B0604030504040204" pitchFamily="34" charset="-120"/>
+              </a:rPr>
+              <a:t>副歌</a:t>
+            </a:r>
+            <a:r>
+              <a:rPr lang="en-US" sz="2400" b="1" dirty="0">
+                <a:solidFill>
+                  <a:srgbClr val="000066"/>
+                </a:solidFill>
+                <a:latin typeface="Microsoft JhengHei" panose="020B0604030504040204" pitchFamily="34" charset="-120"/>
+                <a:ea typeface="Microsoft JhengHei" panose="020B0604030504040204" pitchFamily="34" charset="-120"/>
+              </a:rPr>
+              <a:t> )</a:t>
+            </a:r>
+            <a:endParaRPr lang="vi-VN" sz="2400" b="1" dirty="0">
+              <a:solidFill>
+                <a:srgbClr val="000066"/>
+              </a:solidFill>
+              <a:ea typeface="Microsoft JhengHei" panose="020B0604030504040204" pitchFamily="34" charset="-120"/>
+            </a:endParaRPr>
+          </a:p>
+        </p:txBody>
+      </p:sp>
+    </p:spTree>
+    <p:extLst>
+      <p:ext uri="{BB962C8B-B14F-4D97-AF65-F5344CB8AC3E}">
+        <p14:creationId xmlns:p14="http://schemas.microsoft.com/office/powerpoint/2010/main" val="2547230714"/>
+      </p:ext>
+    </p:extLst>
+  </p:cSld>
+  <p:clrMapOvr>
+    <a:masterClrMapping/>
+  </p:clrMapOvr>
+</p:sld>
+</file>
+
+<file path=ppt/slides/slide4.xml><?xml version="1.0" encoding="utf-8"?>
+<p:sld xmlns:a="http://schemas.openxmlformats.org/drawingml/2006/main" xmlns:r="http://schemas.openxmlformats.org/officeDocument/2006/relationships" xmlns:p="http://schemas.openxmlformats.org/presentationml/2006/main">
+  <p:cSld>
+    <p:spTree>
+      <p:nvGrpSpPr>
+        <p:cNvPr id="1" name="">
+          <a:extLst>
+            <a:ext uri="{FF2B5EF4-FFF2-40B4-BE49-F238E27FC236}">
+              <a16:creationId xmlns:a16="http://schemas.microsoft.com/office/drawing/2014/main" id="{DB4C049C-9708-6A60-2B86-A7510E5039A8}"/>
+            </a:ext>
+          </a:extLst>
+        </p:cNvPr>
+        <p:cNvGrpSpPr/>
+        <p:nvPr/>
+      </p:nvGrpSpPr>
+      <p:grpSpPr>
+        <a:xfrm>
+          <a:off x="0" y="0"/>
+          <a:ext cx="0" cy="0"/>
+          <a:chOff x="0" y="0"/>
+          <a:chExt cx="0" cy="0"/>
+        </a:xfrm>
+      </p:grpSpPr>
+      <p:sp>
+        <p:nvSpPr>
+          <p:cNvPr id="5" name="內容版面配置區 4">
+            <a:extLst>
+              <a:ext uri="{FF2B5EF4-FFF2-40B4-BE49-F238E27FC236}">
+                <a16:creationId xmlns:a16="http://schemas.microsoft.com/office/drawing/2014/main" id="{9588A970-319D-2AC7-9CFD-9E2CDA39876B}"/>
+              </a:ext>
+            </a:extLst>
+          </p:cNvPr>
+          <p:cNvSpPr>
+            <a:spLocks noGrp="1"/>
+          </p:cNvSpPr>
+          <p:nvPr>
+            <p:ph idx="1"/>
+          </p:nvPr>
+        </p:nvSpPr>
+        <p:spPr>
+          <a:xfrm>
+            <a:off x="0" y="1563639"/>
+            <a:ext cx="9144000" cy="1803647"/>
+          </a:xfrm>
+        </p:spPr>
+        <p:txBody>
+          <a:bodyPr anchor="ctr">
+            <a:normAutofit/>
+          </a:bodyPr>
+          <a:lstStyle/>
           <a:p>
             <a:pPr algn="ctr">
               <a:buNone/>
             </a:pPr>
             <a:r>
-              <a:rPr lang="zh-TW" altLang="en-US" sz="4800" b="1" dirty="0" smtClean="0">
+              <a:rPr lang="zh-TW" altLang="en-US" sz="4800" b="1" dirty="0">
                 <a:solidFill>
                   <a:srgbClr val="000066"/>
                 </a:solidFill>
@@ -3420,7 +3575,7 @@
               <a:buNone/>
             </a:pPr>
             <a:r>
-              <a:rPr lang="zh-TW" altLang="en-US" sz="4800" b="1" dirty="0" smtClean="0">
+              <a:rPr lang="zh-TW" altLang="en-US" sz="4800" b="1" dirty="0">
                 <a:solidFill>
                   <a:srgbClr val="000066"/>
                 </a:solidFill>
@@ -3430,57 +3585,106 @@
               <a:t>呼吸</a:t>
             </a:r>
             <a:r>
-              <a:rPr lang="zh-CN" altLang="en-US" sz="4800" b="1" dirty="0" smtClean="0">
+              <a:rPr lang="zh-CN" altLang="en-US" sz="4800" b="1" dirty="0">
                 <a:solidFill>
                   <a:srgbClr val="000066"/>
                 </a:solidFill>
                 <a:latin typeface="微軟正黑體" pitchFamily="34" charset="-120"/>
                 <a:ea typeface="微軟正黑體" pitchFamily="34" charset="-120"/>
               </a:rPr>
-              <a:t>袮</a:t>
-            </a:r>
-            <a:r>
-              <a:rPr lang="zh-TW" altLang="en-US" sz="4800" b="1" dirty="0" smtClean="0">
+              <a:t>祢</a:t>
+            </a:r>
+            <a:r>
+              <a:rPr lang="zh-TW" altLang="en-US" sz="4800" b="1" dirty="0">
                 <a:solidFill>
                   <a:srgbClr val="000066"/>
                 </a:solidFill>
                 <a:latin typeface="微軟正黑體" pitchFamily="34" charset="-120"/>
                 <a:ea typeface="微軟正黑體" pitchFamily="34" charset="-120"/>
               </a:rPr>
-              <a:t>賜福</a:t>
-            </a:r>
-            <a:r>
-              <a:rPr lang="zh-TW" altLang="en-US" sz="4800" b="1" dirty="0" smtClean="0">
+              <a:t>賜福的空氣</a:t>
+            </a:r>
+          </a:p>
+        </p:txBody>
+      </p:sp>
+      <p:sp>
+        <p:nvSpPr>
+          <p:cNvPr id="3" name="TextBox 2">
+            <a:extLst>
+              <a:ext uri="{FF2B5EF4-FFF2-40B4-BE49-F238E27FC236}">
+                <a16:creationId xmlns:a16="http://schemas.microsoft.com/office/drawing/2014/main" id="{E0FAFF4B-764F-DE34-F88E-61917FFAC388}"/>
+              </a:ext>
+            </a:extLst>
+          </p:cNvPr>
+          <p:cNvSpPr txBox="1"/>
+          <p:nvPr/>
+        </p:nvSpPr>
+        <p:spPr>
+          <a:xfrm>
+            <a:off x="0" y="3867895"/>
+            <a:ext cx="9144000" cy="461665"/>
+          </a:xfrm>
+          <a:prstGeom prst="rect">
+            <a:avLst/>
+          </a:prstGeom>
+          <a:noFill/>
+        </p:spPr>
+        <p:txBody>
+          <a:bodyPr wrap="square" rtlCol="0">
+            <a:spAutoFit/>
+          </a:bodyPr>
+          <a:lstStyle/>
+          <a:p>
+            <a:pPr algn="ctr"/>
+            <a:r>
+              <a:rPr lang="en-US" sz="2400" b="1" dirty="0">
                 <a:solidFill>
                   <a:srgbClr val="000066"/>
                 </a:solidFill>
-                <a:latin typeface="微軟正黑體" pitchFamily="34" charset="-120"/>
-                <a:ea typeface="微軟正黑體" pitchFamily="34" charset="-120"/>
+                <a:latin typeface="Microsoft JhengHei" panose="020B0604030504040204" pitchFamily="34" charset="-120"/>
+                <a:ea typeface="Microsoft JhengHei" panose="020B0604030504040204" pitchFamily="34" charset="-120"/>
               </a:rPr>
-              <a:t>的空氣</a:t>
-            </a:r>
-            <a:endParaRPr lang="zh-TW" altLang="en-US" sz="4800" b="1" dirty="0">
+              <a:t>( </a:t>
+            </a:r>
+            <a:r>
+              <a:rPr lang="zh-CN" altLang="en-US" sz="2400" b="1" dirty="0">
+                <a:solidFill>
+                  <a:srgbClr val="000066"/>
+                </a:solidFill>
+                <a:latin typeface="Microsoft JhengHei" panose="020B0604030504040204" pitchFamily="34" charset="-120"/>
+                <a:ea typeface="Microsoft JhengHei" panose="020B0604030504040204" pitchFamily="34" charset="-120"/>
+              </a:rPr>
+              <a:t>副歌</a:t>
+            </a:r>
+            <a:r>
+              <a:rPr lang="en-US" sz="2400" b="1" dirty="0">
+                <a:solidFill>
+                  <a:srgbClr val="000066"/>
+                </a:solidFill>
+                <a:latin typeface="Microsoft JhengHei" panose="020B0604030504040204" pitchFamily="34" charset="-120"/>
+                <a:ea typeface="Microsoft JhengHei" panose="020B0604030504040204" pitchFamily="34" charset="-120"/>
+              </a:rPr>
+              <a:t> )</a:t>
+            </a:r>
+            <a:endParaRPr lang="vi-VN" sz="2400" b="1" dirty="0">
               <a:solidFill>
                 <a:srgbClr val="000066"/>
               </a:solidFill>
-              <a:latin typeface="微軟正黑體" pitchFamily="34" charset="-120"/>
-              <a:ea typeface="微軟正黑體" pitchFamily="34" charset="-120"/>
+              <a:ea typeface="Microsoft JhengHei" panose="020B0604030504040204" pitchFamily="34" charset="-120"/>
             </a:endParaRPr>
           </a:p>
         </p:txBody>
       </p:sp>
     </p:spTree>
+    <p:extLst>
+      <p:ext uri="{BB962C8B-B14F-4D97-AF65-F5344CB8AC3E}">
+        <p14:creationId xmlns:p14="http://schemas.microsoft.com/office/powerpoint/2010/main" val="4257506330"/>
+      </p:ext>
+    </p:extLst>
   </p:cSld>
   <p:clrMapOvr>
     <a:masterClrMapping/>
   </p:clrMapOvr>
-  <p:timing>
-    <p:tnLst>
-      <p:par>
-        <p:cTn id="1" dur="indefinite" restart="never" nodeType="tmRoot"/>
-      </p:par>
-    </p:tnLst>
-  </p:timing>
 </p:sld>
 </file>
 
